--- a/splunk-es-soar-techtouch-demo/slides/M365乗っ取り対応デモ_事前説明_短縮版.pptx
+++ b/splunk-es-soar-techtouch-demo/slides/M365乗っ取り対応デモ_事前説明_短縮版.pptx
@@ -1111,7 +1111,7 @@
       </p:sp>
       <p:sp>
         <p:nvSpPr>
-          <p:cNvPr id="25" name="Slide Number Placeholder 0"/>
+          <p:cNvPr id="5" name="Slide Number Placeholder 0"/>
           <p:cNvSpPr>
             <a:spLocks noGrp="1"/>
           </p:cNvSpPr>
@@ -1181,7 +1181,7 @@
       </p:grpSpPr>
       <p:sp>
         <p:nvSpPr>
-          <p:cNvPr id="25" name="Slide Number Placeholder 0"/>
+          <p:cNvPr id="2" name="Slide Number Placeholder 0"/>
           <p:cNvSpPr>
             <a:spLocks noGrp="1"/>
           </p:cNvSpPr>
@@ -3325,7 +3325,7 @@
       </p:sp>
       <p:sp>
         <p:nvSpPr>
-          <p:cNvPr id="25" name="Slide Number Placeholder 0"/>
+          <p:cNvPr id="54" name="Slide Number Placeholder 0"/>
           <p:cNvSpPr>
             <a:spLocks noGrp="1"/>
           </p:cNvSpPr>
@@ -5589,7 +5589,7 @@
       </p:sp>
       <p:sp>
         <p:nvSpPr>
-          <p:cNvPr id="25" name="Slide Number Placeholder 0"/>
+          <p:cNvPr id="73" name="Slide Number Placeholder 0"/>
           <p:cNvSpPr>
             <a:spLocks noGrp="1"/>
           </p:cNvSpPr>
@@ -6901,7 +6901,7 @@
       </p:sp>
       <p:sp>
         <p:nvSpPr>
-          <p:cNvPr id="25" name="Slide Number Placeholder 0"/>
+          <p:cNvPr id="42" name="Slide Number Placeholder 0"/>
           <p:cNvSpPr>
             <a:spLocks noGrp="1"/>
           </p:cNvSpPr>
